--- a/Web_Development_Technology/Class_Notes/React/React Day-5/08Form_formik.pptx
+++ b/Web_Development_Technology/Class_Notes/React/React Day-5/08Form_formik.pptx
@@ -216,7 +216,7 @@
           <a:p>
             <a:fld id="{A02A5F55-251C-4F81-9AC1-F0A080185D9D}" type="datetimeFigureOut">
               <a:rPr lang="en-IN" smtClean="0"/>
-              <a:t>02-02-2024</a:t>
+              <a:t>13-05-2025</a:t>
             </a:fld>
             <a:endParaRPr lang="en-IN"/>
           </a:p>
@@ -633,7 +633,7 @@
           <a:p>
             <a:fld id="{D6FE7E06-79CA-4948-8009-C5BAAA988AD0}" type="datetimeFigureOut">
               <a:rPr lang="en-IN" smtClean="0"/>
-              <a:t>02-02-2024</a:t>
+              <a:t>13-05-2025</a:t>
             </a:fld>
             <a:endParaRPr lang="en-IN"/>
           </a:p>
@@ -833,7 +833,7 @@
           <a:p>
             <a:fld id="{D6FE7E06-79CA-4948-8009-C5BAAA988AD0}" type="datetimeFigureOut">
               <a:rPr lang="en-IN" smtClean="0"/>
-              <a:t>02-02-2024</a:t>
+              <a:t>13-05-2025</a:t>
             </a:fld>
             <a:endParaRPr lang="en-IN"/>
           </a:p>
@@ -1043,7 +1043,7 @@
           <a:p>
             <a:fld id="{D6FE7E06-79CA-4948-8009-C5BAAA988AD0}" type="datetimeFigureOut">
               <a:rPr lang="en-IN" smtClean="0"/>
-              <a:t>02-02-2024</a:t>
+              <a:t>13-05-2025</a:t>
             </a:fld>
             <a:endParaRPr lang="en-IN"/>
           </a:p>
@@ -1243,7 +1243,7 @@
           <a:p>
             <a:fld id="{D6FE7E06-79CA-4948-8009-C5BAAA988AD0}" type="datetimeFigureOut">
               <a:rPr lang="en-IN" smtClean="0"/>
-              <a:t>02-02-2024</a:t>
+              <a:t>13-05-2025</a:t>
             </a:fld>
             <a:endParaRPr lang="en-IN"/>
           </a:p>
@@ -1519,7 +1519,7 @@
           <a:p>
             <a:fld id="{D6FE7E06-79CA-4948-8009-C5BAAA988AD0}" type="datetimeFigureOut">
               <a:rPr lang="en-IN" smtClean="0"/>
-              <a:t>02-02-2024</a:t>
+              <a:t>13-05-2025</a:t>
             </a:fld>
             <a:endParaRPr lang="en-IN"/>
           </a:p>
@@ -1787,7 +1787,7 @@
           <a:p>
             <a:fld id="{D6FE7E06-79CA-4948-8009-C5BAAA988AD0}" type="datetimeFigureOut">
               <a:rPr lang="en-IN" smtClean="0"/>
-              <a:t>02-02-2024</a:t>
+              <a:t>13-05-2025</a:t>
             </a:fld>
             <a:endParaRPr lang="en-IN"/>
           </a:p>
@@ -2202,7 +2202,7 @@
           <a:p>
             <a:fld id="{D6FE7E06-79CA-4948-8009-C5BAAA988AD0}" type="datetimeFigureOut">
               <a:rPr lang="en-IN" smtClean="0"/>
-              <a:t>02-02-2024</a:t>
+              <a:t>13-05-2025</a:t>
             </a:fld>
             <a:endParaRPr lang="en-IN"/>
           </a:p>
@@ -2344,7 +2344,7 @@
           <a:p>
             <a:fld id="{D6FE7E06-79CA-4948-8009-C5BAAA988AD0}" type="datetimeFigureOut">
               <a:rPr lang="en-IN" smtClean="0"/>
-              <a:t>02-02-2024</a:t>
+              <a:t>13-05-2025</a:t>
             </a:fld>
             <a:endParaRPr lang="en-IN"/>
           </a:p>
@@ -2457,7 +2457,7 @@
           <a:p>
             <a:fld id="{D6FE7E06-79CA-4948-8009-C5BAAA988AD0}" type="datetimeFigureOut">
               <a:rPr lang="en-IN" smtClean="0"/>
-              <a:t>02-02-2024</a:t>
+              <a:t>13-05-2025</a:t>
             </a:fld>
             <a:endParaRPr lang="en-IN"/>
           </a:p>
@@ -2770,7 +2770,7 @@
           <a:p>
             <a:fld id="{D6FE7E06-79CA-4948-8009-C5BAAA988AD0}" type="datetimeFigureOut">
               <a:rPr lang="en-IN" smtClean="0"/>
-              <a:t>02-02-2024</a:t>
+              <a:t>13-05-2025</a:t>
             </a:fld>
             <a:endParaRPr lang="en-IN"/>
           </a:p>
@@ -3059,7 +3059,7 @@
           <a:p>
             <a:fld id="{D6FE7E06-79CA-4948-8009-C5BAAA988AD0}" type="datetimeFigureOut">
               <a:rPr lang="en-IN" smtClean="0"/>
-              <a:t>02-02-2024</a:t>
+              <a:t>13-05-2025</a:t>
             </a:fld>
             <a:endParaRPr lang="en-IN"/>
           </a:p>
@@ -3302,7 +3302,7 @@
           <a:p>
             <a:fld id="{D6FE7E06-79CA-4948-8009-C5BAAA988AD0}" type="datetimeFigureOut">
               <a:rPr lang="en-IN" smtClean="0"/>
-              <a:t>02-02-2024</a:t>
+              <a:t>13-05-2025</a:t>
             </a:fld>
             <a:endParaRPr lang="en-IN"/>
           </a:p>
